--- a/Präsentation4.pptx
+++ b/Präsentation4.pptx
@@ -5,15 +5,16 @@
     <p:sldMasterId id="2147483699" r:id="rId1"/>
   </p:sldMasterIdLst>
   <p:notesMasterIdLst>
-    <p:notesMasterId r:id="rId8"/>
+    <p:notesMasterId r:id="rId9"/>
   </p:notesMasterIdLst>
   <p:sldIdLst>
     <p:sldId id="362" r:id="rId2"/>
     <p:sldId id="259" r:id="rId3"/>
     <p:sldId id="263" r:id="rId4"/>
-    <p:sldId id="265" r:id="rId5"/>
-    <p:sldId id="354" r:id="rId6"/>
-    <p:sldId id="321" r:id="rId7"/>
+    <p:sldId id="334" r:id="rId5"/>
+    <p:sldId id="265" r:id="rId6"/>
+    <p:sldId id="354" r:id="rId7"/>
+    <p:sldId id="321" r:id="rId8"/>
   </p:sldIdLst>
   <p:sldSz cx="12192000" cy="6858000"/>
   <p:notesSz cx="6858000" cy="9144000"/>
@@ -124,6 +125,7 @@
           <p14:sldIdLst>
             <p14:sldId id="259"/>
             <p14:sldId id="263"/>
+            <p14:sldId id="334"/>
             <p14:sldId id="265"/>
             <p14:sldId id="354"/>
             <p14:sldId id="321"/>
@@ -732,7 +734,7 @@
     </p:spTree>
     <p:extLst>
       <p:ext uri="{BB962C8B-B14F-4D97-AF65-F5344CB8AC3E}">
-        <p14:creationId xmlns:p14="http://schemas.microsoft.com/office/powerpoint/2010/main" val="785651783"/>
+        <p14:creationId xmlns:p14="http://schemas.microsoft.com/office/powerpoint/2010/main" val="1704193176"/>
       </p:ext>
     </p:extLst>
   </p:cSld>
@@ -807,7 +809,91 @@
           <a:p>
             <a:fld id="{9EE2A191-859F-4AFA-B75A-22F57CA5227E}" type="slidenum">
               <a:rPr lang="en-US" smtClean="0"/>
-              <a:t>6</a:t>
+              <a:t>5</a:t>
+            </a:fld>
+            <a:endParaRPr lang="en-US" dirty="0"/>
+          </a:p>
+        </p:txBody>
+      </p:sp>
+    </p:spTree>
+    <p:extLst>
+      <p:ext uri="{BB962C8B-B14F-4D97-AF65-F5344CB8AC3E}">
+        <p14:creationId xmlns:p14="http://schemas.microsoft.com/office/powerpoint/2010/main" val="785651783"/>
+      </p:ext>
+    </p:extLst>
+  </p:cSld>
+  <p:clrMapOvr>
+    <a:masterClrMapping/>
+  </p:clrMapOvr>
+</p:notes>
+</file>
+
+<file path=ppt/notesSlides/notesSlide5.xml><?xml version="1.0" encoding="utf-8"?>
+<p:notes xmlns:a="http://schemas.openxmlformats.org/drawingml/2006/main" xmlns:r="http://schemas.openxmlformats.org/officeDocument/2006/relationships" xmlns:p="http://schemas.openxmlformats.org/presentationml/2006/main">
+  <p:cSld>
+    <p:spTree>
+      <p:nvGrpSpPr>
+        <p:cNvPr id="1" name=""/>
+        <p:cNvGrpSpPr/>
+        <p:nvPr/>
+      </p:nvGrpSpPr>
+      <p:grpSpPr>
+        <a:xfrm>
+          <a:off x="0" y="0"/>
+          <a:ext cx="0" cy="0"/>
+          <a:chOff x="0" y="0"/>
+          <a:chExt cx="0" cy="0"/>
+        </a:xfrm>
+      </p:grpSpPr>
+      <p:sp>
+        <p:nvSpPr>
+          <p:cNvPr id="2" name="Slide Image Placeholder 1"/>
+          <p:cNvSpPr>
+            <a:spLocks noGrp="1" noRot="1" noChangeAspect="1"/>
+          </p:cNvSpPr>
+          <p:nvPr>
+            <p:ph type="sldImg"/>
+          </p:nvPr>
+        </p:nvSpPr>
+        <p:spPr/>
+      </p:sp>
+      <p:sp>
+        <p:nvSpPr>
+          <p:cNvPr id="3" name="Notes Placeholder 2"/>
+          <p:cNvSpPr>
+            <a:spLocks noGrp="1"/>
+          </p:cNvSpPr>
+          <p:nvPr>
+            <p:ph type="body" idx="1"/>
+          </p:nvPr>
+        </p:nvSpPr>
+        <p:spPr/>
+        <p:txBody>
+          <a:bodyPr/>
+          <a:lstStyle/>
+          <a:p>
+            <a:endParaRPr lang="en-US" dirty="0"/>
+          </a:p>
+        </p:txBody>
+      </p:sp>
+      <p:sp>
+        <p:nvSpPr>
+          <p:cNvPr id="4" name="Slide Number Placeholder 3"/>
+          <p:cNvSpPr>
+            <a:spLocks noGrp="1"/>
+          </p:cNvSpPr>
+          <p:nvPr>
+            <p:ph type="sldNum" sz="quarter" idx="10"/>
+          </p:nvPr>
+        </p:nvSpPr>
+        <p:spPr/>
+        <p:txBody>
+          <a:bodyPr/>
+          <a:lstStyle/>
+          <a:p>
+            <a:fld id="{9EE2A191-859F-4AFA-B75A-22F57CA5227E}" type="slidenum">
+              <a:rPr lang="en-US" smtClean="0"/>
+              <a:t>7</a:t>
             </a:fld>
             <a:endParaRPr lang="en-US" dirty="0"/>
           </a:p>
@@ -11745,6 +11831,1017 @@
           <a:chExt cx="0" cy="0"/>
         </a:xfrm>
       </p:grpSpPr>
+      <p:graphicFrame>
+        <p:nvGraphicFramePr>
+          <p:cNvPr id="3" name="Tabelle 3">
+            <a:extLst>
+              <a:ext uri="{FF2B5EF4-FFF2-40B4-BE49-F238E27FC236}">
+                <a16:creationId xmlns:a16="http://schemas.microsoft.com/office/drawing/2014/main" id="{B14E5C94-5987-4591-A37C-C0D361507F8D}"/>
+              </a:ext>
+            </a:extLst>
+          </p:cNvPr>
+          <p:cNvGraphicFramePr>
+            <a:graphicFrameLocks noGrp="1"/>
+          </p:cNvGraphicFramePr>
+          <p:nvPr/>
+        </p:nvGraphicFramePr>
+        <p:xfrm>
+          <a:off x="334963" y="2381251"/>
+          <a:ext cx="2674050" cy="2930040"/>
+        </p:xfrm>
+        <a:graphic>
+          <a:graphicData uri="http://schemas.openxmlformats.org/drawingml/2006/table">
+            <a:tbl>
+              <a:tblPr firstRow="1" bandRow="1">
+                <a:tableStyleId>{5C22544A-7EE6-4342-B048-85BDC9FD1C3A}</a:tableStyleId>
+              </a:tblPr>
+              <a:tblGrid>
+                <a:gridCol w="2674050">
+                  <a:extLst>
+                    <a:ext uri="{9D8B030D-6E8A-4147-A177-3AD203B41FA5}">
+                      <a16:colId xmlns:a16="http://schemas.microsoft.com/office/drawing/2014/main" val="4277567972"/>
+                    </a:ext>
+                  </a:extLst>
+                </a:gridCol>
+              </a:tblGrid>
+              <a:tr h="262365">
+                <a:tc>
+                  <a:txBody>
+                    <a:bodyPr/>
+                    <a:lstStyle/>
+                    <a:p>
+                      <a:pPr marL="0" indent="0">
+                        <a:buFont typeface="Wingdings" panose="05000000000000000000" pitchFamily="2" charset="2"/>
+                        <a:buNone/>
+                      </a:pPr>
+                      <a:r>
+                        <a:rPr lang="en-US" sz="1600" dirty="0">
+                          <a:solidFill>
+                            <a:schemeClr val="accent1"/>
+                          </a:solidFill>
+                        </a:rPr>
+                        <a:t>Placeholder text</a:t>
+                      </a:r>
+                    </a:p>
+                  </a:txBody>
+                  <a:tcPr marL="0" marR="0" marT="0" marB="90000">
+                    <a:lnB w="28575" cap="flat" cmpd="sng" algn="ctr">
+                      <a:solidFill>
+                        <a:schemeClr val="accent1"/>
+                      </a:solidFill>
+                      <a:prstDash val="solid"/>
+                      <a:round/>
+                      <a:headEnd type="none" w="med" len="med"/>
+                      <a:tailEnd type="none" w="med" len="med"/>
+                    </a:lnB>
+                    <a:noFill/>
+                  </a:tcPr>
+                </a:tc>
+                <a:extLst>
+                  <a:ext uri="{0D108BD9-81ED-4DB2-BD59-A6C34878D82A}">
+                    <a16:rowId xmlns:a16="http://schemas.microsoft.com/office/drawing/2014/main" val="210192422"/>
+                  </a:ext>
+                </a:extLst>
+              </a:tr>
+              <a:tr h="2040351">
+                <a:tc>
+                  <a:txBody>
+                    <a:bodyPr/>
+                    <a:lstStyle/>
+                    <a:p>
+                      <a:pPr marL="179388" indent="-179388">
+                        <a:spcAft>
+                          <a:spcPts val="600"/>
+                        </a:spcAft>
+                        <a:buClr>
+                          <a:schemeClr val="accent1"/>
+                        </a:buClr>
+                        <a:buFont typeface="Wingdings" panose="05000000000000000000" pitchFamily="2" charset="2"/>
+                        <a:buChar char="§"/>
+                      </a:pPr>
+                      <a:r>
+                        <a:rPr lang="en-US" sz="1400" dirty="0">
+                          <a:solidFill>
+                            <a:schemeClr val="tx2"/>
+                          </a:solidFill>
+                        </a:rPr>
+                        <a:t>This text can be replaced with your own text.</a:t>
+                      </a:r>
+                    </a:p>
+                    <a:p>
+                      <a:pPr marL="179388" indent="-179388">
+                        <a:spcAft>
+                          <a:spcPts val="600"/>
+                        </a:spcAft>
+                        <a:buClr>
+                          <a:schemeClr val="accent1"/>
+                        </a:buClr>
+                        <a:buFont typeface="Wingdings" panose="05000000000000000000" pitchFamily="2" charset="2"/>
+                        <a:buChar char="§"/>
+                      </a:pPr>
+                      <a:r>
+                        <a:rPr lang="en-US" sz="1400" dirty="0">
+                          <a:solidFill>
+                            <a:schemeClr val="tx2"/>
+                          </a:solidFill>
+                        </a:rPr>
+                        <a:t>This is placeholder text. All phrases can be replaced with your own text.</a:t>
+                      </a:r>
+                    </a:p>
+                    <a:p>
+                      <a:pPr marL="179388" indent="-179388">
+                        <a:spcAft>
+                          <a:spcPts val="600"/>
+                        </a:spcAft>
+                        <a:buClr>
+                          <a:schemeClr val="accent1"/>
+                        </a:buClr>
+                        <a:buFont typeface="Wingdings" panose="05000000000000000000" pitchFamily="2" charset="2"/>
+                        <a:buChar char="§"/>
+                      </a:pPr>
+                      <a:r>
+                        <a:rPr lang="en-US" sz="1400" dirty="0">
+                          <a:solidFill>
+                            <a:schemeClr val="tx2"/>
+                          </a:solidFill>
+                        </a:rPr>
+                        <a:t>This text can be replaced with your own text.</a:t>
+                      </a:r>
+                    </a:p>
+                    <a:p>
+                      <a:pPr marL="179388" indent="-179388">
+                        <a:spcAft>
+                          <a:spcPts val="600"/>
+                        </a:spcAft>
+                        <a:buClr>
+                          <a:schemeClr val="accent1"/>
+                        </a:buClr>
+                        <a:buFont typeface="Wingdings" panose="05000000000000000000" pitchFamily="2" charset="2"/>
+                        <a:buChar char="§"/>
+                      </a:pPr>
+                      <a:r>
+                        <a:rPr lang="en-US" sz="1400" dirty="0">
+                          <a:solidFill>
+                            <a:schemeClr val="tx2"/>
+                          </a:solidFill>
+                        </a:rPr>
+                        <a:t>This is placeholder text. All phrases can be replaced with your own text.</a:t>
+                      </a:r>
+                    </a:p>
+                  </a:txBody>
+                  <a:tcPr marL="0" marR="0" marT="144000" marB="90000">
+                    <a:lnT w="28575" cap="flat" cmpd="sng" algn="ctr">
+                      <a:solidFill>
+                        <a:schemeClr val="accent1"/>
+                      </a:solidFill>
+                      <a:prstDash val="solid"/>
+                      <a:round/>
+                      <a:headEnd type="none" w="med" len="med"/>
+                      <a:tailEnd type="none" w="med" len="med"/>
+                    </a:lnT>
+                    <a:noFill/>
+                  </a:tcPr>
+                </a:tc>
+                <a:extLst>
+                  <a:ext uri="{0D108BD9-81ED-4DB2-BD59-A6C34878D82A}">
+                    <a16:rowId xmlns:a16="http://schemas.microsoft.com/office/drawing/2014/main" val="1294676028"/>
+                  </a:ext>
+                </a:extLst>
+              </a:tr>
+            </a:tbl>
+          </a:graphicData>
+        </a:graphic>
+      </p:graphicFrame>
+      <p:sp>
+        <p:nvSpPr>
+          <p:cNvPr id="6" name="Foliennummernplatzhalter 5">
+            <a:extLst>
+              <a:ext uri="{FF2B5EF4-FFF2-40B4-BE49-F238E27FC236}">
+                <a16:creationId xmlns:a16="http://schemas.microsoft.com/office/drawing/2014/main" id="{C4A7B52D-382D-4BA4-B582-A21E2B583BCF}"/>
+              </a:ext>
+            </a:extLst>
+          </p:cNvPr>
+          <p:cNvSpPr>
+            <a:spLocks noGrp="1"/>
+          </p:cNvSpPr>
+          <p:nvPr>
+            <p:ph type="sldNum" sz="quarter" idx="12"/>
+          </p:nvPr>
+        </p:nvSpPr>
+        <p:spPr/>
+        <p:txBody>
+          <a:bodyPr/>
+          <a:lstStyle/>
+          <a:p>
+            <a:fld id="{D9C9FAE0-E2AD-420B-97E0-B97E16EE01A5}" type="slidenum">
+              <a:rPr lang="en-US" smtClean="0"/>
+              <a:pPr/>
+              <a:t>4</a:t>
+            </a:fld>
+            <a:endParaRPr lang="en-US" dirty="0"/>
+          </a:p>
+        </p:txBody>
+      </p:sp>
+      <p:sp>
+        <p:nvSpPr>
+          <p:cNvPr id="2" name="Titel 1"/>
+          <p:cNvSpPr>
+            <a:spLocks noGrp="1"/>
+          </p:cNvSpPr>
+          <p:nvPr>
+            <p:ph type="title"/>
+          </p:nvPr>
+        </p:nvSpPr>
+        <p:spPr bwMode="gray"/>
+        <p:txBody>
+          <a:bodyPr/>
+          <a:lstStyle/>
+          <a:p>
+            <a:r>
+              <a:rPr lang="en-US" dirty="0"/>
+              <a:t>4 boxes with icons</a:t>
+            </a:r>
+          </a:p>
+        </p:txBody>
+      </p:sp>
+      <p:graphicFrame>
+        <p:nvGraphicFramePr>
+          <p:cNvPr id="11" name="Tabelle 3">
+            <a:extLst>
+              <a:ext uri="{FF2B5EF4-FFF2-40B4-BE49-F238E27FC236}">
+                <a16:creationId xmlns:a16="http://schemas.microsoft.com/office/drawing/2014/main" id="{2B5AB8C7-46CE-47AC-9395-A9683BD629E8}"/>
+              </a:ext>
+            </a:extLst>
+          </p:cNvPr>
+          <p:cNvGraphicFramePr>
+            <a:graphicFrameLocks noGrp="1"/>
+          </p:cNvGraphicFramePr>
+          <p:nvPr/>
+        </p:nvGraphicFramePr>
+        <p:xfrm>
+          <a:off x="3284305" y="2381251"/>
+          <a:ext cx="2674050" cy="2930040"/>
+        </p:xfrm>
+        <a:graphic>
+          <a:graphicData uri="http://schemas.openxmlformats.org/drawingml/2006/table">
+            <a:tbl>
+              <a:tblPr firstRow="1" bandRow="1">
+                <a:tableStyleId>{5C22544A-7EE6-4342-B048-85BDC9FD1C3A}</a:tableStyleId>
+              </a:tblPr>
+              <a:tblGrid>
+                <a:gridCol w="2674050">
+                  <a:extLst>
+                    <a:ext uri="{9D8B030D-6E8A-4147-A177-3AD203B41FA5}">
+                      <a16:colId xmlns:a16="http://schemas.microsoft.com/office/drawing/2014/main" val="4277567972"/>
+                    </a:ext>
+                  </a:extLst>
+                </a:gridCol>
+              </a:tblGrid>
+              <a:tr h="262365">
+                <a:tc>
+                  <a:txBody>
+                    <a:bodyPr/>
+                    <a:lstStyle/>
+                    <a:p>
+                      <a:pPr marL="0" indent="0">
+                        <a:buFont typeface="Wingdings" panose="05000000000000000000" pitchFamily="2" charset="2"/>
+                        <a:buNone/>
+                      </a:pPr>
+                      <a:r>
+                        <a:rPr lang="en-US" sz="1600" dirty="0">
+                          <a:solidFill>
+                            <a:schemeClr val="accent1"/>
+                          </a:solidFill>
+                        </a:rPr>
+                        <a:t>Placeholder text</a:t>
+                      </a:r>
+                    </a:p>
+                  </a:txBody>
+                  <a:tcPr marL="0" marR="0" marT="0" marB="90000">
+                    <a:lnB w="28575" cap="flat" cmpd="sng" algn="ctr">
+                      <a:solidFill>
+                        <a:schemeClr val="accent1"/>
+                      </a:solidFill>
+                      <a:prstDash val="solid"/>
+                      <a:round/>
+                      <a:headEnd type="none" w="med" len="med"/>
+                      <a:tailEnd type="none" w="med" len="med"/>
+                    </a:lnB>
+                    <a:noFill/>
+                  </a:tcPr>
+                </a:tc>
+                <a:extLst>
+                  <a:ext uri="{0D108BD9-81ED-4DB2-BD59-A6C34878D82A}">
+                    <a16:rowId xmlns:a16="http://schemas.microsoft.com/office/drawing/2014/main" val="210192422"/>
+                  </a:ext>
+                </a:extLst>
+              </a:tr>
+              <a:tr h="2040351">
+                <a:tc>
+                  <a:txBody>
+                    <a:bodyPr/>
+                    <a:lstStyle/>
+                    <a:p>
+                      <a:pPr marL="179388" indent="-179388">
+                        <a:spcBef>
+                          <a:spcPts val="0"/>
+                        </a:spcBef>
+                        <a:spcAft>
+                          <a:spcPts val="600"/>
+                        </a:spcAft>
+                        <a:buClr>
+                          <a:schemeClr val="accent1"/>
+                        </a:buClr>
+                        <a:buFont typeface="Wingdings" panose="05000000000000000000" pitchFamily="2" charset="2"/>
+                        <a:buChar char="§"/>
+                      </a:pPr>
+                      <a:r>
+                        <a:rPr lang="en-US" sz="1400" dirty="0">
+                          <a:solidFill>
+                            <a:schemeClr val="tx2"/>
+                          </a:solidFill>
+                        </a:rPr>
+                        <a:t>This text can be replaced with your own text.</a:t>
+                      </a:r>
+                    </a:p>
+                    <a:p>
+                      <a:pPr marL="179388" indent="-179388">
+                        <a:spcBef>
+                          <a:spcPts val="0"/>
+                        </a:spcBef>
+                        <a:spcAft>
+                          <a:spcPts val="600"/>
+                        </a:spcAft>
+                        <a:buClr>
+                          <a:schemeClr val="accent1"/>
+                        </a:buClr>
+                        <a:buFont typeface="Wingdings" panose="05000000000000000000" pitchFamily="2" charset="2"/>
+                        <a:buChar char="§"/>
+                      </a:pPr>
+                      <a:r>
+                        <a:rPr lang="en-US" sz="1400" dirty="0">
+                          <a:solidFill>
+                            <a:schemeClr val="tx2"/>
+                          </a:solidFill>
+                        </a:rPr>
+                        <a:t>This is placeholder text. All phrases can be replaced with your own text.</a:t>
+                      </a:r>
+                    </a:p>
+                    <a:p>
+                      <a:pPr marL="179388" indent="-179388">
+                        <a:spcBef>
+                          <a:spcPts val="0"/>
+                        </a:spcBef>
+                        <a:spcAft>
+                          <a:spcPts val="600"/>
+                        </a:spcAft>
+                        <a:buClr>
+                          <a:schemeClr val="accent1"/>
+                        </a:buClr>
+                        <a:buFont typeface="Wingdings" panose="05000000000000000000" pitchFamily="2" charset="2"/>
+                        <a:buChar char="§"/>
+                      </a:pPr>
+                      <a:r>
+                        <a:rPr lang="en-US" sz="1400" dirty="0">
+                          <a:solidFill>
+                            <a:schemeClr val="tx2"/>
+                          </a:solidFill>
+                        </a:rPr>
+                        <a:t>This text can be replaced with your own text.</a:t>
+                      </a:r>
+                    </a:p>
+                    <a:p>
+                      <a:pPr marL="179388" indent="-179388">
+                        <a:spcBef>
+                          <a:spcPts val="0"/>
+                        </a:spcBef>
+                        <a:spcAft>
+                          <a:spcPts val="600"/>
+                        </a:spcAft>
+                        <a:buClr>
+                          <a:schemeClr val="accent1"/>
+                        </a:buClr>
+                        <a:buFont typeface="Wingdings" panose="05000000000000000000" pitchFamily="2" charset="2"/>
+                        <a:buChar char="§"/>
+                      </a:pPr>
+                      <a:r>
+                        <a:rPr lang="en-US" sz="1400" dirty="0">
+                          <a:solidFill>
+                            <a:schemeClr val="tx2"/>
+                          </a:solidFill>
+                        </a:rPr>
+                        <a:t>This is placeholder text. All phrases can be replaced with your own text.</a:t>
+                      </a:r>
+                    </a:p>
+                  </a:txBody>
+                  <a:tcPr marL="0" marR="0" marT="144000" marB="90000">
+                    <a:lnT w="28575" cap="flat" cmpd="sng" algn="ctr">
+                      <a:solidFill>
+                        <a:schemeClr val="accent1"/>
+                      </a:solidFill>
+                      <a:prstDash val="solid"/>
+                      <a:round/>
+                      <a:headEnd type="none" w="med" len="med"/>
+                      <a:tailEnd type="none" w="med" len="med"/>
+                    </a:lnT>
+                    <a:noFill/>
+                  </a:tcPr>
+                </a:tc>
+                <a:extLst>
+                  <a:ext uri="{0D108BD9-81ED-4DB2-BD59-A6C34878D82A}">
+                    <a16:rowId xmlns:a16="http://schemas.microsoft.com/office/drawing/2014/main" val="1294676028"/>
+                  </a:ext>
+                </a:extLst>
+              </a:tr>
+            </a:tbl>
+          </a:graphicData>
+        </a:graphic>
+      </p:graphicFrame>
+      <p:graphicFrame>
+        <p:nvGraphicFramePr>
+          <p:cNvPr id="12" name="Tabelle 3">
+            <a:extLst>
+              <a:ext uri="{FF2B5EF4-FFF2-40B4-BE49-F238E27FC236}">
+                <a16:creationId xmlns:a16="http://schemas.microsoft.com/office/drawing/2014/main" id="{0454AAAE-2675-4B39-A0D1-0E6BF265EA1E}"/>
+              </a:ext>
+            </a:extLst>
+          </p:cNvPr>
+          <p:cNvGraphicFramePr>
+            <a:graphicFrameLocks noGrp="1"/>
+          </p:cNvGraphicFramePr>
+          <p:nvPr/>
+        </p:nvGraphicFramePr>
+        <p:xfrm>
+          <a:off x="6233647" y="2381251"/>
+          <a:ext cx="2674050" cy="2930040"/>
+        </p:xfrm>
+        <a:graphic>
+          <a:graphicData uri="http://schemas.openxmlformats.org/drawingml/2006/table">
+            <a:tbl>
+              <a:tblPr firstRow="1" bandRow="1">
+                <a:tableStyleId>{5C22544A-7EE6-4342-B048-85BDC9FD1C3A}</a:tableStyleId>
+              </a:tblPr>
+              <a:tblGrid>
+                <a:gridCol w="2674050">
+                  <a:extLst>
+                    <a:ext uri="{9D8B030D-6E8A-4147-A177-3AD203B41FA5}">
+                      <a16:colId xmlns:a16="http://schemas.microsoft.com/office/drawing/2014/main" val="4277567972"/>
+                    </a:ext>
+                  </a:extLst>
+                </a:gridCol>
+              </a:tblGrid>
+              <a:tr h="262365">
+                <a:tc>
+                  <a:txBody>
+                    <a:bodyPr/>
+                    <a:lstStyle/>
+                    <a:p>
+                      <a:pPr marL="0" indent="0">
+                        <a:buFont typeface="Wingdings" panose="05000000000000000000" pitchFamily="2" charset="2"/>
+                        <a:buNone/>
+                      </a:pPr>
+                      <a:r>
+                        <a:rPr lang="en-US" sz="1600" dirty="0">
+                          <a:solidFill>
+                            <a:schemeClr val="accent1"/>
+                          </a:solidFill>
+                        </a:rPr>
+                        <a:t>Placeholder text</a:t>
+                      </a:r>
+                    </a:p>
+                  </a:txBody>
+                  <a:tcPr marL="0" marR="0" marT="0" marB="90000">
+                    <a:lnB w="28575" cap="flat" cmpd="sng" algn="ctr">
+                      <a:solidFill>
+                        <a:schemeClr val="accent1"/>
+                      </a:solidFill>
+                      <a:prstDash val="solid"/>
+                      <a:round/>
+                      <a:headEnd type="none" w="med" len="med"/>
+                      <a:tailEnd type="none" w="med" len="med"/>
+                    </a:lnB>
+                    <a:noFill/>
+                  </a:tcPr>
+                </a:tc>
+                <a:extLst>
+                  <a:ext uri="{0D108BD9-81ED-4DB2-BD59-A6C34878D82A}">
+                    <a16:rowId xmlns:a16="http://schemas.microsoft.com/office/drawing/2014/main" val="210192422"/>
+                  </a:ext>
+                </a:extLst>
+              </a:tr>
+              <a:tr h="2040351">
+                <a:tc>
+                  <a:txBody>
+                    <a:bodyPr/>
+                    <a:lstStyle/>
+                    <a:p>
+                      <a:pPr marL="285750" indent="-285750">
+                        <a:spcAft>
+                          <a:spcPts val="600"/>
+                        </a:spcAft>
+                        <a:buClr>
+                          <a:schemeClr val="accent1"/>
+                        </a:buClr>
+                        <a:buFont typeface="Wingdings" panose="05000000000000000000" pitchFamily="2" charset="2"/>
+                        <a:buChar char="§"/>
+                      </a:pPr>
+                      <a:r>
+                        <a:rPr lang="en-US" sz="1400" dirty="0">
+                          <a:solidFill>
+                            <a:schemeClr val="tx2"/>
+                          </a:solidFill>
+                        </a:rPr>
+                        <a:t>This text can be replaced with your own text.</a:t>
+                      </a:r>
+                    </a:p>
+                    <a:p>
+                      <a:pPr marL="285750" indent="-285750">
+                        <a:spcAft>
+                          <a:spcPts val="600"/>
+                        </a:spcAft>
+                        <a:buClr>
+                          <a:schemeClr val="accent1"/>
+                        </a:buClr>
+                        <a:buFont typeface="Wingdings" panose="05000000000000000000" pitchFamily="2" charset="2"/>
+                        <a:buChar char="§"/>
+                      </a:pPr>
+                      <a:r>
+                        <a:rPr lang="en-US" sz="1400" dirty="0">
+                          <a:solidFill>
+                            <a:schemeClr val="tx2"/>
+                          </a:solidFill>
+                        </a:rPr>
+                        <a:t>This is placeholder text. All phrases can be replaced with your own text.</a:t>
+                      </a:r>
+                    </a:p>
+                    <a:p>
+                      <a:pPr marL="285750" indent="-285750">
+                        <a:spcAft>
+                          <a:spcPts val="600"/>
+                        </a:spcAft>
+                        <a:buClr>
+                          <a:schemeClr val="accent1"/>
+                        </a:buClr>
+                        <a:buFont typeface="Wingdings" panose="05000000000000000000" pitchFamily="2" charset="2"/>
+                        <a:buChar char="§"/>
+                      </a:pPr>
+                      <a:r>
+                        <a:rPr lang="en-US" sz="1400" dirty="0">
+                          <a:solidFill>
+                            <a:schemeClr val="tx2"/>
+                          </a:solidFill>
+                        </a:rPr>
+                        <a:t>This text can be replaced with your own text.</a:t>
+                      </a:r>
+                    </a:p>
+                    <a:p>
+                      <a:pPr marL="285750" indent="-285750">
+                        <a:spcAft>
+                          <a:spcPts val="600"/>
+                        </a:spcAft>
+                        <a:buClr>
+                          <a:schemeClr val="accent1"/>
+                        </a:buClr>
+                        <a:buFont typeface="Wingdings" panose="05000000000000000000" pitchFamily="2" charset="2"/>
+                        <a:buChar char="§"/>
+                      </a:pPr>
+                      <a:r>
+                        <a:rPr lang="en-US" sz="1400" dirty="0">
+                          <a:solidFill>
+                            <a:schemeClr val="tx2"/>
+                          </a:solidFill>
+                        </a:rPr>
+                        <a:t>This is placeholder text. All phrases can be replaced with your own text.</a:t>
+                      </a:r>
+                    </a:p>
+                  </a:txBody>
+                  <a:tcPr marL="0" marR="0" marT="144000" marB="90000">
+                    <a:lnT w="28575" cap="flat" cmpd="sng" algn="ctr">
+                      <a:solidFill>
+                        <a:schemeClr val="accent1"/>
+                      </a:solidFill>
+                      <a:prstDash val="solid"/>
+                      <a:round/>
+                      <a:headEnd type="none" w="med" len="med"/>
+                      <a:tailEnd type="none" w="med" len="med"/>
+                    </a:lnT>
+                    <a:noFill/>
+                  </a:tcPr>
+                </a:tc>
+                <a:extLst>
+                  <a:ext uri="{0D108BD9-81ED-4DB2-BD59-A6C34878D82A}">
+                    <a16:rowId xmlns:a16="http://schemas.microsoft.com/office/drawing/2014/main" val="1294676028"/>
+                  </a:ext>
+                </a:extLst>
+              </a:tr>
+            </a:tbl>
+          </a:graphicData>
+        </a:graphic>
+      </p:graphicFrame>
+      <p:graphicFrame>
+        <p:nvGraphicFramePr>
+          <p:cNvPr id="13" name="Tabelle 3">
+            <a:extLst>
+              <a:ext uri="{FF2B5EF4-FFF2-40B4-BE49-F238E27FC236}">
+                <a16:creationId xmlns:a16="http://schemas.microsoft.com/office/drawing/2014/main" id="{242164EC-DE75-4AE2-926B-4CC3EBBA6F93}"/>
+              </a:ext>
+            </a:extLst>
+          </p:cNvPr>
+          <p:cNvGraphicFramePr>
+            <a:graphicFrameLocks noGrp="1"/>
+          </p:cNvGraphicFramePr>
+          <p:nvPr/>
+        </p:nvGraphicFramePr>
+        <p:xfrm>
+          <a:off x="9182988" y="2381251"/>
+          <a:ext cx="2674050" cy="2930040"/>
+        </p:xfrm>
+        <a:graphic>
+          <a:graphicData uri="http://schemas.openxmlformats.org/drawingml/2006/table">
+            <a:tbl>
+              <a:tblPr firstRow="1" bandRow="1">
+                <a:tableStyleId>{5C22544A-7EE6-4342-B048-85BDC9FD1C3A}</a:tableStyleId>
+              </a:tblPr>
+              <a:tblGrid>
+                <a:gridCol w="2674050">
+                  <a:extLst>
+                    <a:ext uri="{9D8B030D-6E8A-4147-A177-3AD203B41FA5}">
+                      <a16:colId xmlns:a16="http://schemas.microsoft.com/office/drawing/2014/main" val="4277567972"/>
+                    </a:ext>
+                  </a:extLst>
+                </a:gridCol>
+              </a:tblGrid>
+              <a:tr h="262365">
+                <a:tc>
+                  <a:txBody>
+                    <a:bodyPr/>
+                    <a:lstStyle/>
+                    <a:p>
+                      <a:pPr marL="0" indent="0">
+                        <a:buFont typeface="Wingdings" panose="05000000000000000000" pitchFamily="2" charset="2"/>
+                        <a:buNone/>
+                      </a:pPr>
+                      <a:r>
+                        <a:rPr lang="en-US" sz="1600" dirty="0">
+                          <a:solidFill>
+                            <a:schemeClr val="accent1"/>
+                          </a:solidFill>
+                        </a:rPr>
+                        <a:t>Placeholder text</a:t>
+                      </a:r>
+                    </a:p>
+                  </a:txBody>
+                  <a:tcPr marL="0" marR="0" marT="0" marB="90000">
+                    <a:lnB w="28575" cap="flat" cmpd="sng" algn="ctr">
+                      <a:solidFill>
+                        <a:schemeClr val="accent1"/>
+                      </a:solidFill>
+                      <a:prstDash val="solid"/>
+                      <a:round/>
+                      <a:headEnd type="none" w="med" len="med"/>
+                      <a:tailEnd type="none" w="med" len="med"/>
+                    </a:lnB>
+                    <a:noFill/>
+                  </a:tcPr>
+                </a:tc>
+                <a:extLst>
+                  <a:ext uri="{0D108BD9-81ED-4DB2-BD59-A6C34878D82A}">
+                    <a16:rowId xmlns:a16="http://schemas.microsoft.com/office/drawing/2014/main" val="210192422"/>
+                  </a:ext>
+                </a:extLst>
+              </a:tr>
+              <a:tr h="2040351">
+                <a:tc>
+                  <a:txBody>
+                    <a:bodyPr/>
+                    <a:lstStyle/>
+                    <a:p>
+                      <a:pPr marL="285750" indent="-285750">
+                        <a:spcAft>
+                          <a:spcPts val="600"/>
+                        </a:spcAft>
+                        <a:buClr>
+                          <a:schemeClr val="accent1"/>
+                        </a:buClr>
+                        <a:buFont typeface="Wingdings" panose="05000000000000000000" pitchFamily="2" charset="2"/>
+                        <a:buChar char="§"/>
+                      </a:pPr>
+                      <a:r>
+                        <a:rPr lang="en-US" sz="1400" dirty="0">
+                          <a:solidFill>
+                            <a:schemeClr val="tx2"/>
+                          </a:solidFill>
+                        </a:rPr>
+                        <a:t>This text can be replaced with your own text.</a:t>
+                      </a:r>
+                    </a:p>
+                    <a:p>
+                      <a:pPr marL="285750" indent="-285750">
+                        <a:spcAft>
+                          <a:spcPts val="600"/>
+                        </a:spcAft>
+                        <a:buClr>
+                          <a:schemeClr val="accent1"/>
+                        </a:buClr>
+                        <a:buFont typeface="Wingdings" panose="05000000000000000000" pitchFamily="2" charset="2"/>
+                        <a:buChar char="§"/>
+                      </a:pPr>
+                      <a:r>
+                        <a:rPr lang="en-US" sz="1400" dirty="0">
+                          <a:solidFill>
+                            <a:schemeClr val="tx2"/>
+                          </a:solidFill>
+                        </a:rPr>
+                        <a:t>This is placeholder text. All phrases can be replaced with your own text.</a:t>
+                      </a:r>
+                    </a:p>
+                    <a:p>
+                      <a:pPr marL="285750" indent="-285750">
+                        <a:spcAft>
+                          <a:spcPts val="600"/>
+                        </a:spcAft>
+                        <a:buClr>
+                          <a:schemeClr val="accent1"/>
+                        </a:buClr>
+                        <a:buFont typeface="Wingdings" panose="05000000000000000000" pitchFamily="2" charset="2"/>
+                        <a:buChar char="§"/>
+                      </a:pPr>
+                      <a:r>
+                        <a:rPr lang="en-US" sz="1400" dirty="0">
+                          <a:solidFill>
+                            <a:schemeClr val="tx2"/>
+                          </a:solidFill>
+                        </a:rPr>
+                        <a:t>This text can be replaced with your own text.</a:t>
+                      </a:r>
+                    </a:p>
+                    <a:p>
+                      <a:pPr marL="285750" indent="-285750">
+                        <a:spcAft>
+                          <a:spcPts val="600"/>
+                        </a:spcAft>
+                        <a:buClr>
+                          <a:schemeClr val="accent1"/>
+                        </a:buClr>
+                        <a:buFont typeface="Wingdings" panose="05000000000000000000" pitchFamily="2" charset="2"/>
+                        <a:buChar char="§"/>
+                      </a:pPr>
+                      <a:r>
+                        <a:rPr lang="en-US" sz="1400" dirty="0">
+                          <a:solidFill>
+                            <a:schemeClr val="tx2"/>
+                          </a:solidFill>
+                        </a:rPr>
+                        <a:t>This is placeholder text. All phrases can be replaced with your own text.</a:t>
+                      </a:r>
+                    </a:p>
+                  </a:txBody>
+                  <a:tcPr marL="0" marR="0" marT="144000" marB="90000">
+                    <a:lnT w="28575" cap="flat" cmpd="sng" algn="ctr">
+                      <a:solidFill>
+                        <a:schemeClr val="accent1"/>
+                      </a:solidFill>
+                      <a:prstDash val="solid"/>
+                      <a:round/>
+                      <a:headEnd type="none" w="med" len="med"/>
+                      <a:tailEnd type="none" w="med" len="med"/>
+                    </a:lnT>
+                    <a:noFill/>
+                  </a:tcPr>
+                </a:tc>
+                <a:extLst>
+                  <a:ext uri="{0D108BD9-81ED-4DB2-BD59-A6C34878D82A}">
+                    <a16:rowId xmlns:a16="http://schemas.microsoft.com/office/drawing/2014/main" val="1294676028"/>
+                  </a:ext>
+                </a:extLst>
+              </a:tr>
+            </a:tbl>
+          </a:graphicData>
+        </a:graphic>
+      </p:graphicFrame>
+      <p:pic>
+        <p:nvPicPr>
+          <p:cNvPr id="9" name="Grafik 8">
+            <a:extLst>
+              <a:ext uri="{FF2B5EF4-FFF2-40B4-BE49-F238E27FC236}">
+                <a16:creationId xmlns:a16="http://schemas.microsoft.com/office/drawing/2014/main" id="{01989374-8B49-49C8-AE91-6DAA8B1B96B8}"/>
+              </a:ext>
+            </a:extLst>
+          </p:cNvPr>
+          <p:cNvPicPr>
+            <a:picLocks noChangeAspect="1"/>
+          </p:cNvPicPr>
+          <p:nvPr/>
+        </p:nvPicPr>
+        <p:blipFill>
+          <a:blip>
+            <a:extLst>
+              <a:ext uri="{28A0092B-C50C-407E-A947-70E740481C1C}">
+                <a14:useLocalDpi xmlns:a14="http://schemas.microsoft.com/office/drawing/2010/main"/>
+              </a:ext>
+              <a:ext uri="{96DAC541-7B7A-43D3-8B79-37D633B846F1}">
+                <asvg:svgBlip xmlns:asvg="http://schemas.microsoft.com/office/drawing/2016/SVG/main" r:embed="rId3"/>
+              </a:ext>
+            </a:extLst>
+          </a:blip>
+          <a:stretch>
+            <a:fillRect/>
+          </a:stretch>
+        </p:blipFill>
+        <p:spPr>
+          <a:xfrm>
+            <a:off x="334963" y="1592263"/>
+            <a:ext cx="609600" cy="609600"/>
+          </a:xfrm>
+          <a:prstGeom prst="rect">
+            <a:avLst/>
+          </a:prstGeom>
+        </p:spPr>
+      </p:pic>
+      <p:pic>
+        <p:nvPicPr>
+          <p:cNvPr id="10" name="Grafik 9">
+            <a:extLst>
+              <a:ext uri="{FF2B5EF4-FFF2-40B4-BE49-F238E27FC236}">
+                <a16:creationId xmlns:a16="http://schemas.microsoft.com/office/drawing/2014/main" id="{6CD3EEDD-2AEA-4FE3-B8C5-DDFEC3590204}"/>
+              </a:ext>
+            </a:extLst>
+          </p:cNvPr>
+          <p:cNvPicPr>
+            <a:picLocks noChangeAspect="1"/>
+          </p:cNvPicPr>
+          <p:nvPr/>
+        </p:nvPicPr>
+        <p:blipFill>
+          <a:blip>
+            <a:extLst>
+              <a:ext uri="{28A0092B-C50C-407E-A947-70E740481C1C}">
+                <a14:useLocalDpi xmlns:a14="http://schemas.microsoft.com/office/drawing/2010/main"/>
+              </a:ext>
+              <a:ext uri="{96DAC541-7B7A-43D3-8B79-37D633B846F1}">
+                <asvg:svgBlip xmlns:asvg="http://schemas.microsoft.com/office/drawing/2016/SVG/main" r:embed="rId4"/>
+              </a:ext>
+            </a:extLst>
+          </a:blip>
+          <a:stretch>
+            <a:fillRect/>
+          </a:stretch>
+        </p:blipFill>
+        <p:spPr>
+          <a:xfrm>
+            <a:off x="3284304" y="1592263"/>
+            <a:ext cx="609600" cy="609600"/>
+          </a:xfrm>
+          <a:prstGeom prst="rect">
+            <a:avLst/>
+          </a:prstGeom>
+        </p:spPr>
+      </p:pic>
+      <p:pic>
+        <p:nvPicPr>
+          <p:cNvPr id="14" name="Grafik 13">
+            <a:extLst>
+              <a:ext uri="{FF2B5EF4-FFF2-40B4-BE49-F238E27FC236}">
+                <a16:creationId xmlns:a16="http://schemas.microsoft.com/office/drawing/2014/main" id="{7C25A113-B393-4527-AF80-4823CAD4CB39}"/>
+              </a:ext>
+            </a:extLst>
+          </p:cNvPr>
+          <p:cNvPicPr>
+            <a:picLocks noChangeAspect="1"/>
+          </p:cNvPicPr>
+          <p:nvPr/>
+        </p:nvPicPr>
+        <p:blipFill>
+          <a:blip>
+            <a:extLst>
+              <a:ext uri="{28A0092B-C50C-407E-A947-70E740481C1C}">
+                <a14:useLocalDpi xmlns:a14="http://schemas.microsoft.com/office/drawing/2010/main"/>
+              </a:ext>
+              <a:ext uri="{96DAC541-7B7A-43D3-8B79-37D633B846F1}">
+                <asvg:svgBlip xmlns:asvg="http://schemas.microsoft.com/office/drawing/2016/SVG/main" r:embed="rId5"/>
+              </a:ext>
+            </a:extLst>
+          </a:blip>
+          <a:stretch>
+            <a:fillRect/>
+          </a:stretch>
+        </p:blipFill>
+        <p:spPr>
+          <a:xfrm>
+            <a:off x="6233647" y="1592263"/>
+            <a:ext cx="609600" cy="609600"/>
+          </a:xfrm>
+          <a:prstGeom prst="rect">
+            <a:avLst/>
+          </a:prstGeom>
+        </p:spPr>
+      </p:pic>
+      <p:pic>
+        <p:nvPicPr>
+          <p:cNvPr id="16" name="Grafik 15">
+            <a:extLst>
+              <a:ext uri="{FF2B5EF4-FFF2-40B4-BE49-F238E27FC236}">
+                <a16:creationId xmlns:a16="http://schemas.microsoft.com/office/drawing/2014/main" id="{83DFEA86-D2DC-4708-89B1-F3AFFB39D075}"/>
+              </a:ext>
+            </a:extLst>
+          </p:cNvPr>
+          <p:cNvPicPr>
+            <a:picLocks noChangeAspect="1"/>
+          </p:cNvPicPr>
+          <p:nvPr/>
+        </p:nvPicPr>
+        <p:blipFill>
+          <a:blip>
+            <a:extLst>
+              <a:ext uri="{28A0092B-C50C-407E-A947-70E740481C1C}">
+                <a14:useLocalDpi xmlns:a14="http://schemas.microsoft.com/office/drawing/2010/main"/>
+              </a:ext>
+              <a:ext uri="{96DAC541-7B7A-43D3-8B79-37D633B846F1}">
+                <asvg:svgBlip xmlns:asvg="http://schemas.microsoft.com/office/drawing/2016/SVG/main" r:embed="rId6"/>
+              </a:ext>
+            </a:extLst>
+          </a:blip>
+          <a:stretch>
+            <a:fillRect/>
+          </a:stretch>
+        </p:blipFill>
+        <p:spPr>
+          <a:xfrm>
+            <a:off x="9182988" y="1592263"/>
+            <a:ext cx="609600" cy="609600"/>
+          </a:xfrm>
+          <a:prstGeom prst="rect">
+            <a:avLst/>
+          </a:prstGeom>
+        </p:spPr>
+      </p:pic>
+      <p:sp>
+        <p:nvSpPr>
+          <p:cNvPr id="4" name="Footer Placeholder 3">
+            <a:extLst>
+              <a:ext uri="{FF2B5EF4-FFF2-40B4-BE49-F238E27FC236}">
+                <a16:creationId xmlns:a16="http://schemas.microsoft.com/office/drawing/2014/main" id="{E7CB3A6D-788B-4780-905D-FD962C8969B1}"/>
+              </a:ext>
+            </a:extLst>
+          </p:cNvPr>
+          <p:cNvSpPr>
+            <a:spLocks noGrp="1"/>
+          </p:cNvSpPr>
+          <p:nvPr>
+            <p:ph type="ftr" sz="quarter" idx="11"/>
+          </p:nvPr>
+        </p:nvSpPr>
+        <p:spPr/>
+        <p:txBody>
+          <a:bodyPr/>
+          <a:lstStyle/>
+          <a:p>
+            <a:endParaRPr lang="de-DE" dirty="0"/>
+          </a:p>
+        </p:txBody>
+      </p:sp>
+    </p:spTree>
+    <p:extLst>
+      <p:ext uri="{BB962C8B-B14F-4D97-AF65-F5344CB8AC3E}">
+        <p14:creationId xmlns:p14="http://schemas.microsoft.com/office/powerpoint/2010/main" val="67062851"/>
+      </p:ext>
+    </p:extLst>
+  </p:cSld>
+  <p:clrMapOvr>
+    <a:masterClrMapping/>
+  </p:clrMapOvr>
+  <mc:AlternateContent xmlns:mc="http://schemas.openxmlformats.org/markup-compatibility/2006" xmlns:p14="http://schemas.microsoft.com/office/powerpoint/2010/main">
+    <mc:Choice Requires="p14">
+      <p:transition spd="med" p14:dur="700">
+        <p:fade/>
+      </p:transition>
+    </mc:Choice>
+    <mc:Fallback xmlns="">
+      <p:transition spd="med">
+        <p:fade/>
+      </p:transition>
+    </mc:Fallback>
+  </mc:AlternateContent>
+</p:sld>
+</file>
+
+<file path=ppt/slides/slide5.xml><?xml version="1.0" encoding="utf-8"?>
+<p:sld xmlns:a="http://schemas.openxmlformats.org/drawingml/2006/main" xmlns:r="http://schemas.openxmlformats.org/officeDocument/2006/relationships" xmlns:p="http://schemas.openxmlformats.org/presentationml/2006/main">
+  <p:cSld>
+    <p:spTree>
+      <p:nvGrpSpPr>
+        <p:cNvPr id="1" name=""/>
+        <p:cNvGrpSpPr/>
+        <p:nvPr/>
+      </p:nvGrpSpPr>
+      <p:grpSpPr>
+        <a:xfrm>
+          <a:off x="0" y="0"/>
+          <a:ext cx="0" cy="0"/>
+          <a:chOff x="0" y="0"/>
+          <a:chExt cx="0" cy="0"/>
+        </a:xfrm>
+      </p:grpSpPr>
       <p:pic>
         <p:nvPicPr>
           <p:cNvPr id="27" name="Picture Placeholder 26"/>
@@ -11997,7 +13094,7 @@
             <a:fld id="{D9C9FAE0-E2AD-420B-97E0-B97E16EE01A5}" type="slidenum">
               <a:rPr lang="en-US" smtClean="0"/>
               <a:pPr/>
-              <a:t>4</a:t>
+              <a:t>5</a:t>
             </a:fld>
             <a:endParaRPr lang="en-US" dirty="0"/>
           </a:p>
@@ -12076,7 +13173,7 @@
 </p:sld>
 </file>
 
-<file path=ppt/slides/slide5.xml><?xml version="1.0" encoding="utf-8"?>
+<file path=ppt/slides/slide6.xml><?xml version="1.0" encoding="utf-8"?>
 <p:sld xmlns:a="http://schemas.openxmlformats.org/drawingml/2006/main" xmlns:r="http://schemas.openxmlformats.org/officeDocument/2006/relationships" xmlns:p="http://schemas.openxmlformats.org/presentationml/2006/main">
   <p:cSld>
     <p:spTree>
@@ -12207,7 +13304,7 @@
             <a:fld id="{94176041-F611-405A-BB9C-F44B4516A572}" type="slidenum">
               <a:rPr lang="de-DE" smtClean="0"/>
               <a:pPr/>
-              <a:t>5</a:t>
+              <a:t>6</a:t>
             </a:fld>
             <a:endParaRPr lang="de-DE" dirty="0"/>
           </a:p>
@@ -13072,7 +14169,7 @@
 </p:sld>
 </file>
 
-<file path=ppt/slides/slide6.xml><?xml version="1.0" encoding="utf-8"?>
+<file path=ppt/slides/slide7.xml><?xml version="1.0" encoding="utf-8"?>
 <p:sld xmlns:a="http://schemas.openxmlformats.org/drawingml/2006/main" xmlns:r="http://schemas.openxmlformats.org/officeDocument/2006/relationships" xmlns:p="http://schemas.openxmlformats.org/presentationml/2006/main">
   <p:cSld>
     <p:spTree>
@@ -13295,7 +14392,7 @@
             <a:fld id="{D9C9FAE0-E2AD-420B-97E0-B97E16EE01A5}" type="slidenum">
               <a:rPr lang="en-US" smtClean="0"/>
               <a:pPr/>
-              <a:t>6</a:t>
+              <a:t>7</a:t>
             </a:fld>
             <a:endParaRPr lang="en-US" dirty="0"/>
           </a:p>
